--- a/dokuemntacio/Arduino Bevezetés.pptx
+++ b/dokuemntacio/Arduino Bevezetés.pptx
@@ -14158,7 +14158,7 @@
                 <a:cs typeface="Lato"/>
                 <a:sym typeface="Lato"/>
               </a:rPr>
-              <a:t>kozlovszky</a:t>
+              <a:t>Kozlovszky</a:t>
             </a:r>
             <a:r>
               <a:rPr lang="hu-HU" sz="1800" dirty="0">
